--- a/public/fun/cards/teacher/teacher-27.pptx
+++ b/public/fun/cards/teacher/teacher-27.pptx
@@ -3085,7 +3085,7 @@
     <p:bg>
       <p:bgPr>
         <a:solidFill>
-          <a:srgbClr val="9B367D"/>
+          <a:srgbClr val="F3F4F6"/>
         </a:solidFill>
         <a:effectLst/>
       </p:bgPr>
@@ -3099,23 +3099,23 @@
       <p:grpSpPr/>
       <p:sp>
         <p:nvSpPr>
-          <p:cNvPr id="2" name="Rectangle 1"/>
+          <p:cNvPr id="2" name="Oval 1"/>
           <p:cNvSpPr/>
           <p:nvPr/>
         </p:nvSpPr>
         <p:spPr>
           <a:xfrm>
-            <a:off x="93600" y="93600"/>
-            <a:ext cx="3052800" cy="1612800"/>
+            <a:off x="1591200" y="208800"/>
+            <a:ext cx="57600" cy="57600"/>
           </a:xfrm>
-          <a:prstGeom prst="rect">
+          <a:prstGeom prst="ellipse">
             <a:avLst/>
           </a:prstGeom>
-          <a:noFill/>
-          <a:ln w="10800">
-            <a:solidFill>
-              <a:srgbClr val="F1D0E7"/>
-            </a:solidFill>
+          <a:solidFill>
+            <a:srgbClr val="00C896"/>
+          </a:solidFill>
+          <a:ln>
+            <a:noFill/>
           </a:ln>
         </p:spPr>
         <p:txBody>
@@ -3128,43 +3128,14 @@
       </p:sp>
       <p:sp>
         <p:nvSpPr>
-          <p:cNvPr id="3" name="Rectangle 2"/>
-          <p:cNvSpPr/>
+          <p:cNvPr id="3" name="텍스트"/>
+          <p:cNvSpPr txBox="1"/>
           <p:nvPr/>
         </p:nvSpPr>
         <p:spPr>
           <a:xfrm>
-            <a:off x="144000" y="144000"/>
-            <a:ext cx="2952000" cy="1512000"/>
-          </a:xfrm>
-          <a:prstGeom prst="rect">
-            <a:avLst/>
-          </a:prstGeom>
-          <a:noFill/>
-          <a:ln w="5400">
-            <a:solidFill>
-              <a:srgbClr val="AB5692"/>
-            </a:solidFill>
-          </a:ln>
-        </p:spPr>
-        <p:txBody>
-          <a:bodyPr rtlCol="0" anchor="ctr"/>
-          <a:lstStyle/>
-          <a:p>
-            <a:pPr algn="ctr"/>
-          </a:p>
-        </p:txBody>
-      </p:sp>
-      <p:sp>
-        <p:nvSpPr>
-          <p:cNvPr id="4" name="텍스트"/>
-          <p:cNvSpPr txBox="1"/>
-          <p:nvPr/>
-        </p:nvSpPr>
-        <p:spPr>
-          <a:xfrm>
-            <a:off x="360000" y="280800"/>
-            <a:ext cx="2520000" cy="100800"/>
+            <a:off x="360000" y="468000"/>
+            <a:ext cx="2520000" cy="360000"/>
           </a:xfrm>
           <a:prstGeom prst="rect">
             <a:avLst/>
@@ -3179,32 +3150,32 @@
           <a:p>
             <a:pPr algn="ctr">
               <a:lnSpc>
-                <a:spcPts val="1015"/>
+                <a:spcPts val="3190"/>
               </a:lnSpc>
             </a:pPr>
             <a:r>
-              <a:rPr sz="700" b="1" spc="400">
+              <a:rPr sz="2200" b="1">
                 <a:solidFill>
-                  <a:srgbClr val="E8D2E2"/>
+                  <a:srgbClr val="12151C"/>
                 </a:solidFill>
                 <a:latin typeface="맑은 고딕"/>
                 <a:ea typeface="맑은 고딕"/>
               </a:rPr>
-              <a:t>학교 · 학원 이름</a:t>
-            </a:r>
-          </a:p>
-        </p:txBody>
-      </p:sp>
-      <p:sp>
-        <p:nvSpPr>
-          <p:cNvPr id="5" name="텍스트"/>
+              <a:t>하지안</a:t>
+            </a:r>
+          </a:p>
+        </p:txBody>
+      </p:sp>
+      <p:sp>
+        <p:nvSpPr>
+          <p:cNvPr id="4" name="텍스트"/>
           <p:cNvSpPr txBox="1"/>
           <p:nvPr/>
         </p:nvSpPr>
         <p:spPr>
           <a:xfrm>
-            <a:off x="360000" y="468000"/>
-            <a:ext cx="2520000" cy="313692"/>
+            <a:off x="360000" y="878400"/>
+            <a:ext cx="2520000" cy="171451"/>
           </a:xfrm>
           <a:prstGeom prst="rect">
             <a:avLst/>
@@ -3219,19 +3190,48 @@
           <a:p>
             <a:pPr algn="ctr">
               <a:lnSpc>
-                <a:spcPts val="2755"/>
+                <a:spcPts val="1305"/>
               </a:lnSpc>
             </a:pPr>
             <a:r>
-              <a:rPr sz="1900" b="1" spc="50">
+              <a:rPr sz="900" b="0">
                 <a:solidFill>
-                  <a:srgbClr val="FFFFFF"/>
+                  <a:srgbClr val="6B7280"/>
                 </a:solidFill>
                 <a:latin typeface="맑은 고딕"/>
                 <a:ea typeface="맑은 고딕"/>
               </a:rPr>
-              <a:t>하지안</a:t>
-            </a:r>
+              <a:t>피아노 선생님</a:t>
+            </a:r>
+          </a:p>
+        </p:txBody>
+      </p:sp>
+      <p:sp>
+        <p:nvSpPr>
+          <p:cNvPr id="5" name="Rectangle 4"/>
+          <p:cNvSpPr/>
+          <p:nvPr/>
+        </p:nvSpPr>
+        <p:spPr>
+          <a:xfrm>
+            <a:off x="1530000" y="1137600"/>
+            <a:ext cx="180000" cy="14400"/>
+          </a:xfrm>
+          <a:prstGeom prst="rect">
+            <a:avLst/>
+          </a:prstGeom>
+          <a:solidFill>
+            <a:srgbClr val="00C896"/>
+          </a:solidFill>
+          <a:ln>
+            <a:noFill/>
+          </a:ln>
+        </p:spPr>
+        <p:txBody>
+          <a:bodyPr rtlCol="0" anchor="ctr"/>
+          <a:lstStyle/>
+          <a:p>
+            <a:pPr algn="ctr"/>
           </a:p>
         </p:txBody>
       </p:sp>
@@ -3243,8 +3243,8 @@
         </p:nvSpPr>
         <p:spPr>
           <a:xfrm>
-            <a:off x="360000" y="784800"/>
-            <a:ext cx="2520000" cy="122400"/>
+            <a:off x="360000" y="1267200"/>
+            <a:ext cx="2520000" cy="133351"/>
           </a:xfrm>
           <a:prstGeom prst="rect">
             <a:avLst/>
@@ -3259,61 +3259,32 @@
           <a:p>
             <a:pPr algn="ctr">
               <a:lnSpc>
-                <a:spcPts val="1232"/>
+                <a:spcPts val="1015"/>
               </a:lnSpc>
             </a:pPr>
             <a:r>
-              <a:rPr sz="850" b="1">
+              <a:rPr sz="700" b="0">
                 <a:solidFill>
-                  <a:srgbClr val="F1D0E7"/>
+                  <a:srgbClr val="12151C"/>
                 </a:solidFill>
                 <a:latin typeface="맑은 고딕"/>
                 <a:ea typeface="맑은 고딕"/>
               </a:rPr>
-              <a:t>피아노 선생님</a:t>
-            </a:r>
-          </a:p>
-        </p:txBody>
-      </p:sp>
-      <p:sp>
-        <p:nvSpPr>
-          <p:cNvPr id="7" name="Rectangle 6"/>
-          <p:cNvSpPr/>
+              <a:t>010-1234-5678      name@example.com</a:t>
+            </a:r>
+          </a:p>
+        </p:txBody>
+      </p:sp>
+      <p:sp>
+        <p:nvSpPr>
+          <p:cNvPr id="7" name="텍스트"/>
+          <p:cNvSpPr txBox="1"/>
           <p:nvPr/>
         </p:nvSpPr>
         <p:spPr>
           <a:xfrm>
-            <a:off x="1530000" y="993600"/>
-            <a:ext cx="180000" cy="10800"/>
-          </a:xfrm>
-          <a:prstGeom prst="rect">
-            <a:avLst/>
-          </a:prstGeom>
-          <a:solidFill>
-            <a:srgbClr val="F1D0E7"/>
-          </a:solidFill>
-          <a:ln>
-            <a:noFill/>
-          </a:ln>
-        </p:spPr>
-        <p:txBody>
-          <a:bodyPr rtlCol="0" anchor="ctr"/>
-          <a:lstStyle/>
-          <a:p>
-            <a:pPr algn="ctr"/>
-          </a:p>
-        </p:txBody>
-      </p:sp>
-      <p:sp>
-        <p:nvSpPr>
-          <p:cNvPr id="8" name="텍스트"/>
-          <p:cNvSpPr txBox="1"/>
-          <p:nvPr/>
-        </p:nvSpPr>
-        <p:spPr>
-          <a:xfrm>
-            <a:off x="360000" y="1087200"/>
-            <a:ext cx="2520000" cy="108000"/>
+            <a:off x="360000" y="1425600"/>
+            <a:ext cx="2520000" cy="133351"/>
           </a:xfrm>
           <a:prstGeom prst="rect">
             <a:avLst/>
@@ -3328,32 +3299,32 @@
           <a:p>
             <a:pPr algn="ctr">
               <a:lnSpc>
-                <a:spcPts val="1087"/>
+                <a:spcPts val="1015"/>
               </a:lnSpc>
             </a:pPr>
             <a:r>
-              <a:rPr sz="750" b="0">
+              <a:rPr sz="700" b="0">
                 <a:solidFill>
-                  <a:srgbClr val="FFFFFF"/>
+                  <a:srgbClr val="6B7280"/>
                 </a:solidFill>
                 <a:latin typeface="맑은 고딕"/>
                 <a:ea typeface="맑은 고딕"/>
               </a:rPr>
-              <a:t>010-1234-5678</a:t>
-            </a:r>
-          </a:p>
-        </p:txBody>
-      </p:sp>
-      <p:sp>
-        <p:nvSpPr>
-          <p:cNvPr id="9" name="텍스트"/>
+              <a:t>주소를 입력해 주세요</a:t>
+            </a:r>
+          </a:p>
+        </p:txBody>
+      </p:sp>
+      <p:sp>
+        <p:nvSpPr>
+          <p:cNvPr id="8" name="텍스트"/>
           <p:cNvSpPr txBox="1"/>
           <p:nvPr/>
         </p:nvSpPr>
         <p:spPr>
           <a:xfrm>
-            <a:off x="360000" y="1209600"/>
-            <a:ext cx="2520000" cy="108000"/>
+            <a:off x="360000" y="1576800"/>
+            <a:ext cx="2520000" cy="104776"/>
           </a:xfrm>
           <a:prstGeom prst="rect">
             <a:avLst/>
@@ -3368,259 +3339,22 @@
           <a:p>
             <a:pPr algn="ctr">
               <a:lnSpc>
-                <a:spcPts val="1087"/>
+                <a:spcPts val="797"/>
               </a:lnSpc>
             </a:pPr>
             <a:r>
-              <a:rPr sz="750" b="0">
+              <a:rPr sz="550" b="1" spc="300">
                 <a:solidFill>
-                  <a:srgbClr val="FFFFFF"/>
+                  <a:srgbClr val="6B7280"/>
                 </a:solidFill>
                 <a:latin typeface="맑은 고딕"/>
                 <a:ea typeface="맑은 고딕"/>
               </a:rPr>
-              <a:t>name@example.com</a:t>
-            </a:r>
-          </a:p>
-        </p:txBody>
-      </p:sp>
-      <p:sp>
-        <p:nvSpPr>
-          <p:cNvPr id="10" name="텍스트"/>
-          <p:cNvSpPr txBox="1"/>
-          <p:nvPr/>
-        </p:nvSpPr>
-        <p:spPr>
-          <a:xfrm>
-            <a:off x="360000" y="1332000"/>
-            <a:ext cx="2520000" cy="108000"/>
-          </a:xfrm>
-          <a:prstGeom prst="rect">
-            <a:avLst/>
-          </a:prstGeom>
-          <a:noFill/>
-        </p:spPr>
-        <p:txBody>
-          <a:bodyPr wrap="square" lIns="0" rIns="0" tIns="0" bIns="0" anchor="t">
-            <a:spAutoFit/>
-          </a:bodyPr>
-          <a:lstStyle/>
-          <a:p>
-            <a:pPr algn="ctr">
-              <a:lnSpc>
-                <a:spcPts val="1015"/>
-              </a:lnSpc>
-            </a:pPr>
-            <a:r>
-              <a:rPr sz="700" b="0">
-                <a:solidFill>
-                  <a:srgbClr val="E8D2E2"/>
-                </a:solidFill>
-                <a:latin typeface="맑은 고딕"/>
-                <a:ea typeface="맑은 고딕"/>
-              </a:rPr>
-              <a:t>주소를 입력해 주세요</a:t>
-            </a:r>
-          </a:p>
-        </p:txBody>
-      </p:sp>
-      <p:sp>
-        <p:nvSpPr>
-          <p:cNvPr id="11" name="Oval 10"/>
-          <p:cNvSpPr/>
-          <p:nvPr/>
-        </p:nvSpPr>
-        <p:spPr>
-          <a:xfrm>
-            <a:off x="1589904" y="1517904"/>
-            <a:ext cx="60192" cy="60192"/>
-          </a:xfrm>
-          <a:prstGeom prst="ellipse">
-            <a:avLst/>
-          </a:prstGeom>
-          <a:solidFill>
-            <a:srgbClr val="F1D0E7"/>
-          </a:solidFill>
-          <a:ln>
-            <a:noFill/>
-          </a:ln>
-        </p:spPr>
-        <p:txBody>
-          <a:bodyPr rtlCol="0" anchor="ctr"/>
-          <a:lstStyle/>
-          <a:p>
-            <a:pPr algn="ctr"/>
-          </a:p>
-        </p:txBody>
-      </p:sp>
-      <p:cxnSp>
-        <p:nvCxnSpPr>
-          <p:cNvPr id="12" name="Connector 11"/>
-          <p:cNvCxnSpPr/>
-          <p:nvPr/>
-        </p:nvCxnSpPr>
-        <p:spPr>
-          <a:xfrm>
-            <a:off x="1663776" y="1548000"/>
-            <a:ext cx="19152" cy="0"/>
-          </a:xfrm>
-          <a:prstGeom prst="line">
-            <a:avLst/>
-          </a:prstGeom>
-          <a:ln w="8208">
-            <a:solidFill>
-              <a:srgbClr val="AB5692"/>
-            </a:solidFill>
-          </a:ln>
-        </p:spPr>
-      </p:cxnSp>
-      <p:cxnSp>
-        <p:nvCxnSpPr>
-          <p:cNvPr id="13" name="Connector 12"/>
-          <p:cNvCxnSpPr/>
-          <p:nvPr/>
-        </p:nvCxnSpPr>
-        <p:spPr>
-          <a:xfrm>
-            <a:off x="1650954" y="1578954"/>
-            <a:ext cx="13543" cy="13543"/>
-          </a:xfrm>
-          <a:prstGeom prst="line">
-            <a:avLst/>
-          </a:prstGeom>
-          <a:ln w="8208">
-            <a:solidFill>
-              <a:srgbClr val="AB5692"/>
-            </a:solidFill>
-          </a:ln>
-        </p:spPr>
-      </p:cxnSp>
-      <p:cxnSp>
-        <p:nvCxnSpPr>
-          <p:cNvPr id="14" name="Connector 13"/>
-          <p:cNvCxnSpPr/>
-          <p:nvPr/>
-        </p:nvCxnSpPr>
-        <p:spPr>
-          <a:xfrm>
-            <a:off x="1620000" y="1591776"/>
-            <a:ext cx="0" cy="19152"/>
-          </a:xfrm>
-          <a:prstGeom prst="line">
-            <a:avLst/>
-          </a:prstGeom>
-          <a:ln w="8208">
-            <a:solidFill>
-              <a:srgbClr val="AB5692"/>
-            </a:solidFill>
-          </a:ln>
-        </p:spPr>
-      </p:cxnSp>
-      <p:cxnSp>
-        <p:nvCxnSpPr>
-          <p:cNvPr id="15" name="Connector 14"/>
-          <p:cNvCxnSpPr/>
-          <p:nvPr/>
-        </p:nvCxnSpPr>
-        <p:spPr>
-          <a:xfrm flipH="1">
-            <a:off x="1575503" y="1578954"/>
-            <a:ext cx="13543" cy="13543"/>
-          </a:xfrm>
-          <a:prstGeom prst="line">
-            <a:avLst/>
-          </a:prstGeom>
-          <a:ln w="8208">
-            <a:solidFill>
-              <a:srgbClr val="AB5692"/>
-            </a:solidFill>
-          </a:ln>
-        </p:spPr>
-      </p:cxnSp>
-      <p:cxnSp>
-        <p:nvCxnSpPr>
-          <p:cNvPr id="16" name="Connector 15"/>
-          <p:cNvCxnSpPr/>
-          <p:nvPr/>
-        </p:nvCxnSpPr>
-        <p:spPr>
-          <a:xfrm flipH="1">
-            <a:off x="1557072" y="1548000"/>
-            <a:ext cx="19152" cy="0"/>
-          </a:xfrm>
-          <a:prstGeom prst="line">
-            <a:avLst/>
-          </a:prstGeom>
-          <a:ln w="8208">
-            <a:solidFill>
-              <a:srgbClr val="AB5692"/>
-            </a:solidFill>
-          </a:ln>
-        </p:spPr>
-      </p:cxnSp>
-      <p:cxnSp>
-        <p:nvCxnSpPr>
-          <p:cNvPr id="17" name="Connector 16"/>
-          <p:cNvCxnSpPr/>
-          <p:nvPr/>
-        </p:nvCxnSpPr>
-        <p:spPr>
-          <a:xfrm flipH="1" flipV="1">
-            <a:off x="1575503" y="1503503"/>
-            <a:ext cx="13543" cy="13543"/>
-          </a:xfrm>
-          <a:prstGeom prst="line">
-            <a:avLst/>
-          </a:prstGeom>
-          <a:ln w="8208">
-            <a:solidFill>
-              <a:srgbClr val="AB5692"/>
-            </a:solidFill>
-          </a:ln>
-        </p:spPr>
-      </p:cxnSp>
-      <p:cxnSp>
-        <p:nvCxnSpPr>
-          <p:cNvPr id="18" name="Connector 17"/>
-          <p:cNvCxnSpPr/>
-          <p:nvPr/>
-        </p:nvCxnSpPr>
-        <p:spPr>
-          <a:xfrm flipV="1">
-            <a:off x="1620000" y="1485072"/>
-            <a:ext cx="0" cy="19152"/>
-          </a:xfrm>
-          <a:prstGeom prst="line">
-            <a:avLst/>
-          </a:prstGeom>
-          <a:ln w="8208">
-            <a:solidFill>
-              <a:srgbClr val="AB5692"/>
-            </a:solidFill>
-          </a:ln>
-        </p:spPr>
-      </p:cxnSp>
-      <p:cxnSp>
-        <p:nvCxnSpPr>
-          <p:cNvPr id="19" name="Connector 18"/>
-          <p:cNvCxnSpPr/>
-          <p:nvPr/>
-        </p:nvCxnSpPr>
-        <p:spPr>
-          <a:xfrm flipV="1">
-            <a:off x="1650954" y="1503503"/>
-            <a:ext cx="13543" cy="13543"/>
-          </a:xfrm>
-          <a:prstGeom prst="line">
-            <a:avLst/>
-          </a:prstGeom>
-          <a:ln w="8208">
-            <a:solidFill>
-              <a:srgbClr val="AB5692"/>
-            </a:solidFill>
-          </a:ln>
-        </p:spPr>
-      </p:cxnSp>
+              <a:t>학교 · 학원 이름</a:t>
+            </a:r>
+          </a:p>
+        </p:txBody>
+      </p:sp>
     </p:spTree>
   </p:cSld>
   <p:clrMapOvr>
@@ -3635,7 +3369,7 @@
     <p:bg>
       <p:bgPr>
         <a:solidFill>
-          <a:srgbClr val="FBF8F2"/>
+          <a:srgbClr val="00C896"/>
         </a:solidFill>
         <a:effectLst/>
       </p:bgPr>
@@ -3649,20 +3383,20 @@
       <p:grpSpPr/>
       <p:sp>
         <p:nvSpPr>
-          <p:cNvPr id="2" name="Rectangle 1"/>
+          <p:cNvPr id="2" name="Oval 1"/>
           <p:cNvSpPr/>
           <p:nvPr/>
         </p:nvSpPr>
         <p:spPr>
           <a:xfrm>
-            <a:off x="0" y="0"/>
-            <a:ext cx="64800" cy="1800000"/>
+            <a:off x="1411200" y="295200"/>
+            <a:ext cx="417600" cy="417600"/>
           </a:xfrm>
-          <a:prstGeom prst="rect">
+          <a:prstGeom prst="ellipse">
             <a:avLst/>
           </a:prstGeom>
           <a:solidFill>
-            <a:srgbClr val="91423B"/>
+            <a:srgbClr val="12151C"/>
           </a:solidFill>
           <a:ln>
             <a:noFill/>
@@ -3684,8 +3418,8 @@
         </p:nvSpPr>
         <p:spPr>
           <a:xfrm>
-            <a:off x="252000" y="432000"/>
-            <a:ext cx="2016000" cy="252000"/>
+            <a:off x="1368000" y="324000"/>
+            <a:ext cx="504000" cy="360000"/>
           </a:xfrm>
           <a:prstGeom prst="rect">
             <a:avLst/>
@@ -3693,25 +3427,25 @@
           <a:noFill/>
         </p:spPr>
         <p:txBody>
-          <a:bodyPr wrap="square" lIns="0" rIns="0" tIns="0" bIns="0" anchor="t">
+          <a:bodyPr wrap="square" lIns="0" rIns="0" tIns="0" bIns="0" anchor="ctr">
             <a:spAutoFit/>
           </a:bodyPr>
           <a:lstStyle/>
           <a:p>
-            <a:pPr algn="l">
+            <a:pPr algn="ctr">
               <a:lnSpc>
-                <a:spcPts val="2465"/>
+                <a:spcPts val="3769"/>
               </a:lnSpc>
             </a:pPr>
             <a:r>
-              <a:rPr sz="1700" b="1">
+              <a:rPr sz="2600" b="1">
                 <a:solidFill>
-                  <a:srgbClr val="16263B"/>
+                  <a:srgbClr val="FFFFFF"/>
                 </a:solidFill>
                 <a:latin typeface="맑은 고딕"/>
                 <a:ea typeface="맑은 고딕"/>
               </a:rPr>
-              <a:t>학교 · 학원 이름</a:t>
+              <a:t>학</a:t>
             </a:r>
           </a:p>
         </p:txBody>
@@ -3724,8 +3458,8 @@
         </p:nvSpPr>
         <p:spPr>
           <a:xfrm>
-            <a:off x="252000" y="878400"/>
-            <a:ext cx="2016000" cy="540000"/>
+            <a:off x="360000" y="820800"/>
+            <a:ext cx="2520000" cy="161926"/>
           </a:xfrm>
           <a:prstGeom prst="rect">
             <a:avLst/>
@@ -3738,20 +3472,20 @@
           </a:bodyPr>
           <a:lstStyle/>
           <a:p>
-            <a:pPr algn="l">
+            <a:pPr algn="ctr">
               <a:lnSpc>
                 <a:spcPts val="1232"/>
               </a:lnSpc>
             </a:pPr>
             <a:r>
-              <a:rPr sz="850" b="0">
+              <a:rPr sz="850" b="1" spc="200">
                 <a:solidFill>
-                  <a:srgbClr val="66707B"/>
+                  <a:srgbClr val="12151C"/>
                 </a:solidFill>
                 <a:latin typeface="맑은 고딕"/>
                 <a:ea typeface="맑은 고딕"/>
               </a:rPr>
-              <a:t>따뜻한 눈빛으로 맞이합니다</a:t>
+              <a:t>학교 · 학원 이름</a:t>
             </a:r>
           </a:p>
         </p:txBody>
@@ -3764,18 +3498,17 @@
         </p:nvSpPr>
         <p:spPr>
           <a:xfrm>
-            <a:off x="2520000" y="1080000"/>
-            <a:ext cx="504000" cy="504000"/>
+            <a:off x="1530000" y="1051200"/>
+            <a:ext cx="180000" cy="14400"/>
           </a:xfrm>
           <a:prstGeom prst="rect">
             <a:avLst/>
           </a:prstGeom>
-          <a:noFill/>
-          <a:ln w="9000">
-            <a:solidFill>
-              <a:srgbClr val="91423B"/>
-            </a:solidFill>
-            <a:prstDash val="dash"/>
+          <a:solidFill>
+            <a:srgbClr val="12151C"/>
+          </a:solidFill>
+          <a:ln>
+            <a:noFill/>
           </a:ln>
         </p:spPr>
         <p:txBody>
@@ -3794,8 +3527,8 @@
         </p:nvSpPr>
         <p:spPr>
           <a:xfrm>
-            <a:off x="2520000" y="1080000"/>
-            <a:ext cx="504000" cy="504000"/>
+            <a:off x="540000" y="1188000"/>
+            <a:ext cx="2160000" cy="360000"/>
           </a:xfrm>
           <a:prstGeom prst="rect">
             <a:avLst/>
@@ -3803,7 +3536,7 @@
           <a:noFill/>
         </p:spPr>
         <p:txBody>
-          <a:bodyPr wrap="square" lIns="0" rIns="0" tIns="0" bIns="0" anchor="ctr">
+          <a:bodyPr wrap="square" lIns="0" rIns="0" tIns="0" bIns="0" anchor="t">
             <a:spAutoFit/>
           </a:bodyPr>
           <a:lstStyle/>
@@ -3816,242 +3549,16 @@
             <a:r>
               <a:rPr sz="900" b="1">
                 <a:solidFill>
-                  <a:srgbClr val="66707B"/>
+                  <a:srgbClr val="0E3C37"/>
                 </a:solidFill>
                 <a:latin typeface="맑은 고딕"/>
                 <a:ea typeface="맑은 고딕"/>
               </a:rPr>
-              <a:t>QR</a:t>
-            </a:r>
-          </a:p>
-        </p:txBody>
-      </p:sp>
-      <p:sp>
-        <p:nvSpPr>
-          <p:cNvPr id="7" name="Rectangle 6"/>
-          <p:cNvSpPr/>
-          <p:nvPr/>
-        </p:nvSpPr>
-        <p:spPr>
-          <a:xfrm>
-            <a:off x="252000" y="763200"/>
-            <a:ext cx="201600" cy="14400"/>
-          </a:xfrm>
-          <a:prstGeom prst="rect">
-            <a:avLst/>
-          </a:prstGeom>
-          <a:solidFill>
-            <a:srgbClr val="91423B"/>
-          </a:solidFill>
-          <a:ln>
-            <a:noFill/>
-          </a:ln>
-        </p:spPr>
-        <p:txBody>
-          <a:bodyPr rtlCol="0" anchor="ctr"/>
-          <a:lstStyle/>
-          <a:p>
-            <a:pPr algn="ctr"/>
-          </a:p>
-        </p:txBody>
-      </p:sp>
-      <p:sp>
-        <p:nvSpPr>
-          <p:cNvPr id="8" name="Oval 7"/>
-          <p:cNvSpPr/>
-          <p:nvPr/>
-        </p:nvSpPr>
-        <p:spPr>
-          <a:xfrm>
-            <a:off x="2700720" y="360720"/>
-            <a:ext cx="142560" cy="142560"/>
-          </a:xfrm>
-          <a:prstGeom prst="ellipse">
-            <a:avLst/>
-          </a:prstGeom>
-          <a:solidFill>
-            <a:srgbClr val="91423B"/>
-          </a:solidFill>
-          <a:ln>
-            <a:noFill/>
-          </a:ln>
-        </p:spPr>
-        <p:txBody>
-          <a:bodyPr rtlCol="0" anchor="ctr"/>
-          <a:lstStyle/>
-          <a:p>
-            <a:pPr algn="ctr"/>
-          </a:p>
-        </p:txBody>
-      </p:sp>
-      <p:cxnSp>
-        <p:nvCxnSpPr>
-          <p:cNvPr id="9" name="Connector 8"/>
-          <p:cNvCxnSpPr/>
-          <p:nvPr/>
-        </p:nvCxnSpPr>
-        <p:spPr>
-          <a:xfrm>
-            <a:off x="2875680" y="432000"/>
-            <a:ext cx="45360" cy="0"/>
-          </a:xfrm>
-          <a:prstGeom prst="line">
-            <a:avLst/>
-          </a:prstGeom>
-          <a:ln w="19440">
-            <a:solidFill>
-              <a:srgbClr val="E0CAC8"/>
-            </a:solidFill>
-          </a:ln>
-        </p:spPr>
-      </p:cxnSp>
-      <p:cxnSp>
-        <p:nvCxnSpPr>
-          <p:cNvPr id="10" name="Connector 9"/>
-          <p:cNvCxnSpPr/>
-          <p:nvPr/>
-        </p:nvCxnSpPr>
-        <p:spPr>
-          <a:xfrm>
-            <a:off x="2845313" y="505313"/>
-            <a:ext cx="32074" cy="32074"/>
-          </a:xfrm>
-          <a:prstGeom prst="line">
-            <a:avLst/>
-          </a:prstGeom>
-          <a:ln w="19440">
-            <a:solidFill>
-              <a:srgbClr val="E0CAC8"/>
-            </a:solidFill>
-          </a:ln>
-        </p:spPr>
-      </p:cxnSp>
-      <p:cxnSp>
-        <p:nvCxnSpPr>
-          <p:cNvPr id="11" name="Connector 10"/>
-          <p:cNvCxnSpPr/>
-          <p:nvPr/>
-        </p:nvCxnSpPr>
-        <p:spPr>
-          <a:xfrm>
-            <a:off x="2772000" y="535680"/>
-            <a:ext cx="0" cy="45360"/>
-          </a:xfrm>
-          <a:prstGeom prst="line">
-            <a:avLst/>
-          </a:prstGeom>
-          <a:ln w="19440">
-            <a:solidFill>
-              <a:srgbClr val="E0CAC8"/>
-            </a:solidFill>
-          </a:ln>
-        </p:spPr>
-      </p:cxnSp>
-      <p:cxnSp>
-        <p:nvCxnSpPr>
-          <p:cNvPr id="12" name="Connector 11"/>
-          <p:cNvCxnSpPr/>
-          <p:nvPr/>
-        </p:nvCxnSpPr>
-        <p:spPr>
-          <a:xfrm flipH="1">
-            <a:off x="2666613" y="505313"/>
-            <a:ext cx="32074" cy="32074"/>
-          </a:xfrm>
-          <a:prstGeom prst="line">
-            <a:avLst/>
-          </a:prstGeom>
-          <a:ln w="19440">
-            <a:solidFill>
-              <a:srgbClr val="E0CAC8"/>
-            </a:solidFill>
-          </a:ln>
-        </p:spPr>
-      </p:cxnSp>
-      <p:cxnSp>
-        <p:nvCxnSpPr>
-          <p:cNvPr id="13" name="Connector 12"/>
-          <p:cNvCxnSpPr/>
-          <p:nvPr/>
-        </p:nvCxnSpPr>
-        <p:spPr>
-          <a:xfrm flipH="1">
-            <a:off x="2622960" y="432000"/>
-            <a:ext cx="45360" cy="0"/>
-          </a:xfrm>
-          <a:prstGeom prst="line">
-            <a:avLst/>
-          </a:prstGeom>
-          <a:ln w="19440">
-            <a:solidFill>
-              <a:srgbClr val="E0CAC8"/>
-            </a:solidFill>
-          </a:ln>
-        </p:spPr>
-      </p:cxnSp>
-      <p:cxnSp>
-        <p:nvCxnSpPr>
-          <p:cNvPr id="14" name="Connector 13"/>
-          <p:cNvCxnSpPr/>
-          <p:nvPr/>
-        </p:nvCxnSpPr>
-        <p:spPr>
-          <a:xfrm flipH="1" flipV="1">
-            <a:off x="2666613" y="326613"/>
-            <a:ext cx="32074" cy="32074"/>
-          </a:xfrm>
-          <a:prstGeom prst="line">
-            <a:avLst/>
-          </a:prstGeom>
-          <a:ln w="19440">
-            <a:solidFill>
-              <a:srgbClr val="E0CAC8"/>
-            </a:solidFill>
-          </a:ln>
-        </p:spPr>
-      </p:cxnSp>
-      <p:cxnSp>
-        <p:nvCxnSpPr>
-          <p:cNvPr id="15" name="Connector 14"/>
-          <p:cNvCxnSpPr/>
-          <p:nvPr/>
-        </p:nvCxnSpPr>
-        <p:spPr>
-          <a:xfrm flipV="1">
-            <a:off x="2772000" y="282960"/>
-            <a:ext cx="0" cy="45360"/>
-          </a:xfrm>
-          <a:prstGeom prst="line">
-            <a:avLst/>
-          </a:prstGeom>
-          <a:ln w="19440">
-            <a:solidFill>
-              <a:srgbClr val="E0CAC8"/>
-            </a:solidFill>
-          </a:ln>
-        </p:spPr>
-      </p:cxnSp>
-      <p:cxnSp>
-        <p:nvCxnSpPr>
-          <p:cNvPr id="16" name="Connector 15"/>
-          <p:cNvCxnSpPr/>
-          <p:nvPr/>
-        </p:nvCxnSpPr>
-        <p:spPr>
-          <a:xfrm flipV="1">
-            <a:off x="2845313" y="326613"/>
-            <a:ext cx="32074" cy="32074"/>
-          </a:xfrm>
-          <a:prstGeom prst="line">
-            <a:avLst/>
-          </a:prstGeom>
-          <a:ln w="19440">
-            <a:solidFill>
-              <a:srgbClr val="E0CAC8"/>
-            </a:solidFill>
-          </a:ln>
-        </p:spPr>
-      </p:cxnSp>
+              <a:t>따뜻한 눈빛으로 맞이합니다</a:t>
+            </a:r>
+          </a:p>
+        </p:txBody>
+      </p:sp>
     </p:spTree>
   </p:cSld>
   <p:clrMapOvr>

--- a/public/fun/cards/teacher/teacher-27.pptx
+++ b/public/fun/cards/teacher/teacher-27.pptx
@@ -3097,25 +3097,193 @@
         <p:nvPr/>
       </p:nvGrpSpPr>
       <p:grpSpPr/>
-      <p:sp>
-        <p:nvSpPr>
-          <p:cNvPr id="2" name="Oval 1"/>
+      <p:cxnSp>
+        <p:nvCxnSpPr>
+          <p:cNvPr id="2" name="Connector 1"/>
+          <p:cNvCxnSpPr/>
+          <p:nvPr/>
+        </p:nvCxnSpPr>
+        <p:spPr>
+          <a:xfrm>
+            <a:off x="93600" y="122400"/>
+            <a:ext cx="57600" cy="0"/>
+          </a:xfrm>
+          <a:prstGeom prst="line">
+            <a:avLst/>
+          </a:prstGeom>
+          <a:ln w="3600">
+            <a:solidFill>
+              <a:srgbClr val="DCDFE4"/>
+            </a:solidFill>
+          </a:ln>
+        </p:spPr>
+      </p:cxnSp>
+      <p:cxnSp>
+        <p:nvCxnSpPr>
+          <p:cNvPr id="3" name="Connector 2"/>
+          <p:cNvCxnSpPr/>
+          <p:nvPr/>
+        </p:nvCxnSpPr>
+        <p:spPr>
+          <a:xfrm>
+            <a:off x="122400" y="93600"/>
+            <a:ext cx="0" cy="57600"/>
+          </a:xfrm>
+          <a:prstGeom prst="line">
+            <a:avLst/>
+          </a:prstGeom>
+          <a:ln w="3600">
+            <a:solidFill>
+              <a:srgbClr val="DCDFE4"/>
+            </a:solidFill>
+          </a:ln>
+        </p:spPr>
+      </p:cxnSp>
+      <p:cxnSp>
+        <p:nvCxnSpPr>
+          <p:cNvPr id="4" name="Connector 3"/>
+          <p:cNvCxnSpPr/>
+          <p:nvPr/>
+        </p:nvCxnSpPr>
+        <p:spPr>
+          <a:xfrm>
+            <a:off x="3088800" y="122400"/>
+            <a:ext cx="57600" cy="0"/>
+          </a:xfrm>
+          <a:prstGeom prst="line">
+            <a:avLst/>
+          </a:prstGeom>
+          <a:ln w="3600">
+            <a:solidFill>
+              <a:srgbClr val="DCDFE4"/>
+            </a:solidFill>
+          </a:ln>
+        </p:spPr>
+      </p:cxnSp>
+      <p:cxnSp>
+        <p:nvCxnSpPr>
+          <p:cNvPr id="5" name="Connector 4"/>
+          <p:cNvCxnSpPr/>
+          <p:nvPr/>
+        </p:nvCxnSpPr>
+        <p:spPr>
+          <a:xfrm>
+            <a:off x="3117600" y="93600"/>
+            <a:ext cx="0" cy="57600"/>
+          </a:xfrm>
+          <a:prstGeom prst="line">
+            <a:avLst/>
+          </a:prstGeom>
+          <a:ln w="3600">
+            <a:solidFill>
+              <a:srgbClr val="DCDFE4"/>
+            </a:solidFill>
+          </a:ln>
+        </p:spPr>
+      </p:cxnSp>
+      <p:cxnSp>
+        <p:nvCxnSpPr>
+          <p:cNvPr id="6" name="Connector 5"/>
+          <p:cNvCxnSpPr/>
+          <p:nvPr/>
+        </p:nvCxnSpPr>
+        <p:spPr>
+          <a:xfrm>
+            <a:off x="93600" y="1677600"/>
+            <a:ext cx="57600" cy="0"/>
+          </a:xfrm>
+          <a:prstGeom prst="line">
+            <a:avLst/>
+          </a:prstGeom>
+          <a:ln w="3600">
+            <a:solidFill>
+              <a:srgbClr val="DCDFE4"/>
+            </a:solidFill>
+          </a:ln>
+        </p:spPr>
+      </p:cxnSp>
+      <p:cxnSp>
+        <p:nvCxnSpPr>
+          <p:cNvPr id="7" name="Connector 6"/>
+          <p:cNvCxnSpPr/>
+          <p:nvPr/>
+        </p:nvCxnSpPr>
+        <p:spPr>
+          <a:xfrm>
+            <a:off x="122400" y="1648800"/>
+            <a:ext cx="0" cy="57600"/>
+          </a:xfrm>
+          <a:prstGeom prst="line">
+            <a:avLst/>
+          </a:prstGeom>
+          <a:ln w="3600">
+            <a:solidFill>
+              <a:srgbClr val="DCDFE4"/>
+            </a:solidFill>
+          </a:ln>
+        </p:spPr>
+      </p:cxnSp>
+      <p:cxnSp>
+        <p:nvCxnSpPr>
+          <p:cNvPr id="8" name="Connector 7"/>
+          <p:cNvCxnSpPr/>
+          <p:nvPr/>
+        </p:nvCxnSpPr>
+        <p:spPr>
+          <a:xfrm>
+            <a:off x="3088800" y="1677600"/>
+            <a:ext cx="57600" cy="0"/>
+          </a:xfrm>
+          <a:prstGeom prst="line">
+            <a:avLst/>
+          </a:prstGeom>
+          <a:ln w="3600">
+            <a:solidFill>
+              <a:srgbClr val="DCDFE4"/>
+            </a:solidFill>
+          </a:ln>
+        </p:spPr>
+      </p:cxnSp>
+      <p:cxnSp>
+        <p:nvCxnSpPr>
+          <p:cNvPr id="9" name="Connector 8"/>
+          <p:cNvCxnSpPr/>
+          <p:nvPr/>
+        </p:nvCxnSpPr>
+        <p:spPr>
+          <a:xfrm>
+            <a:off x="3117600" y="1648800"/>
+            <a:ext cx="0" cy="57600"/>
+          </a:xfrm>
+          <a:prstGeom prst="line">
+            <a:avLst/>
+          </a:prstGeom>
+          <a:ln w="3600">
+            <a:solidFill>
+              <a:srgbClr val="DCDFE4"/>
+            </a:solidFill>
+          </a:ln>
+        </p:spPr>
+      </p:cxnSp>
+      <p:sp>
+        <p:nvSpPr>
+          <p:cNvPr id="10" name="Oval 9"/>
           <p:cNvSpPr/>
           <p:nvPr/>
         </p:nvSpPr>
         <p:spPr>
           <a:xfrm>
-            <a:off x="1591200" y="208800"/>
-            <a:ext cx="57600" cy="57600"/>
+            <a:off x="1526400" y="237600"/>
+            <a:ext cx="187200" cy="187200"/>
           </a:xfrm>
           <a:prstGeom prst="ellipse">
             <a:avLst/>
           </a:prstGeom>
-          <a:solidFill>
-            <a:srgbClr val="00C896"/>
-          </a:solidFill>
-          <a:ln>
-            <a:noFill/>
+          <a:noFill/>
+          <a:ln w="5040">
+            <a:solidFill>
+              <a:srgbClr val="00C896"/>
+            </a:solidFill>
           </a:ln>
         </p:spPr>
         <p:txBody>
@@ -3128,14 +3296,14 @@
       </p:sp>
       <p:sp>
         <p:nvSpPr>
-          <p:cNvPr id="3" name="텍스트"/>
+          <p:cNvPr id="11" name="텍스트"/>
           <p:cNvSpPr txBox="1"/>
           <p:nvPr/>
         </p:nvSpPr>
         <p:spPr>
           <a:xfrm>
-            <a:off x="360000" y="468000"/>
-            <a:ext cx="2520000" cy="360000"/>
+            <a:off x="1476000" y="237600"/>
+            <a:ext cx="288000" cy="187200"/>
           </a:xfrm>
           <a:prstGeom prst="rect">
             <a:avLst/>
@@ -3143,6 +3311,46 @@
           <a:noFill/>
         </p:spPr>
         <p:txBody>
+          <a:bodyPr wrap="square" lIns="0" rIns="0" tIns="0" bIns="0" anchor="ctr">
+            <a:spAutoFit/>
+          </a:bodyPr>
+          <a:lstStyle/>
+          <a:p>
+            <a:pPr algn="ctr">
+              <a:lnSpc>
+                <a:spcPts val="1305"/>
+              </a:lnSpc>
+            </a:pPr>
+            <a:r>
+              <a:rPr sz="900" b="1">
+                <a:solidFill>
+                  <a:srgbClr val="00C896"/>
+                </a:solidFill>
+                <a:latin typeface="맑은 고딕"/>
+                <a:ea typeface="맑은 고딕"/>
+              </a:rPr>
+              <a:t>학</a:t>
+            </a:r>
+          </a:p>
+        </p:txBody>
+      </p:sp>
+      <p:sp>
+        <p:nvSpPr>
+          <p:cNvPr id="12" name="텍스트"/>
+          <p:cNvSpPr txBox="1"/>
+          <p:nvPr/>
+        </p:nvSpPr>
+        <p:spPr>
+          <a:xfrm>
+            <a:off x="360000" y="540000"/>
+            <a:ext cx="2520000" cy="237600"/>
+          </a:xfrm>
+          <a:prstGeom prst="rect">
+            <a:avLst/>
+          </a:prstGeom>
+          <a:noFill/>
+        </p:spPr>
+        <p:txBody>
           <a:bodyPr wrap="square" lIns="0" rIns="0" tIns="0" bIns="0" anchor="t">
             <a:spAutoFit/>
           </a:bodyPr>
@@ -3150,11 +3358,11 @@
           <a:p>
             <a:pPr algn="ctr">
               <a:lnSpc>
-                <a:spcPts val="3190"/>
+                <a:spcPts val="1957"/>
               </a:lnSpc>
             </a:pPr>
             <a:r>
-              <a:rPr sz="2200" b="1">
+              <a:rPr sz="1350" b="1" spc="120">
                 <a:solidFill>
                   <a:srgbClr val="12151C"/>
                 </a:solidFill>
@@ -3168,14 +3376,14 @@
       </p:sp>
       <p:sp>
         <p:nvSpPr>
-          <p:cNvPr id="4" name="텍스트"/>
+          <p:cNvPr id="13" name="텍스트"/>
           <p:cNvSpPr txBox="1"/>
           <p:nvPr/>
         </p:nvSpPr>
         <p:spPr>
           <a:xfrm>
-            <a:off x="360000" y="878400"/>
-            <a:ext cx="2520000" cy="171451"/>
+            <a:off x="360000" y="792000"/>
+            <a:ext cx="2520000" cy="133351"/>
           </a:xfrm>
           <a:prstGeom prst="rect">
             <a:avLst/>
@@ -3190,11 +3398,11 @@
           <a:p>
             <a:pPr algn="ctr">
               <a:lnSpc>
-                <a:spcPts val="1305"/>
+                <a:spcPts val="1015"/>
               </a:lnSpc>
             </a:pPr>
             <a:r>
-              <a:rPr sz="900" b="0">
+              <a:rPr sz="700" b="0" spc="60">
                 <a:solidFill>
                   <a:srgbClr val="6B7280"/>
                 </a:solidFill>
@@ -3206,45 +3414,37 @@
           </a:p>
         </p:txBody>
       </p:sp>
-      <p:sp>
-        <p:nvSpPr>
-          <p:cNvPr id="5" name="Rectangle 4"/>
-          <p:cNvSpPr/>
+      <p:cxnSp>
+        <p:nvCxnSpPr>
+          <p:cNvPr id="14" name="Connector 13"/>
+          <p:cNvCxnSpPr/>
           <p:nvPr/>
-        </p:nvSpPr>
-        <p:spPr>
-          <a:xfrm>
-            <a:off x="1530000" y="1137600"/>
-            <a:ext cx="180000" cy="14400"/>
-          </a:xfrm>
-          <a:prstGeom prst="rect">
+        </p:nvCxnSpPr>
+        <p:spPr>
+          <a:xfrm>
+            <a:off x="1440000" y="1015200"/>
+            <a:ext cx="360000" cy="0"/>
+          </a:xfrm>
+          <a:prstGeom prst="line">
             <a:avLst/>
           </a:prstGeom>
-          <a:solidFill>
-            <a:srgbClr val="00C896"/>
-          </a:solidFill>
-          <a:ln>
-            <a:noFill/>
+          <a:ln w="7920">
+            <a:solidFill>
+              <a:srgbClr val="00C896"/>
+            </a:solidFill>
           </a:ln>
         </p:spPr>
-        <p:txBody>
-          <a:bodyPr rtlCol="0" anchor="ctr"/>
-          <a:lstStyle/>
-          <a:p>
-            <a:pPr algn="ctr"/>
-          </a:p>
-        </p:txBody>
-      </p:sp>
-      <p:sp>
-        <p:nvSpPr>
-          <p:cNvPr id="6" name="텍스트"/>
+      </p:cxnSp>
+      <p:sp>
+        <p:nvSpPr>
+          <p:cNvPr id="15" name="텍스트"/>
           <p:cNvSpPr txBox="1"/>
           <p:nvPr/>
         </p:nvSpPr>
         <p:spPr>
           <a:xfrm>
-            <a:off x="360000" y="1267200"/>
-            <a:ext cx="2520000" cy="133351"/>
+            <a:off x="360000" y="1101600"/>
+            <a:ext cx="2520000" cy="123826"/>
           </a:xfrm>
           <a:prstGeom prst="rect">
             <a:avLst/>
@@ -3259,32 +3459,72 @@
           <a:p>
             <a:pPr algn="ctr">
               <a:lnSpc>
-                <a:spcPts val="1015"/>
+                <a:spcPts val="942"/>
               </a:lnSpc>
             </a:pPr>
             <a:r>
-              <a:rPr sz="700" b="0">
+              <a:rPr sz="650" b="1" spc="220">
+                <a:solidFill>
+                  <a:srgbClr val="6B7280"/>
+                </a:solidFill>
+                <a:latin typeface="맑은 고딕"/>
+                <a:ea typeface="맑은 고딕"/>
+              </a:rPr>
+              <a:t>학교 · 학원 이름</a:t>
+            </a:r>
+          </a:p>
+        </p:txBody>
+      </p:sp>
+      <p:sp>
+        <p:nvSpPr>
+          <p:cNvPr id="16" name="텍스트"/>
+          <p:cNvSpPr txBox="1"/>
+          <p:nvPr/>
+        </p:nvSpPr>
+        <p:spPr>
+          <a:xfrm>
+            <a:off x="360000" y="1339200"/>
+            <a:ext cx="2520000" cy="123826"/>
+          </a:xfrm>
+          <a:prstGeom prst="rect">
+            <a:avLst/>
+          </a:prstGeom>
+          <a:noFill/>
+        </p:spPr>
+        <p:txBody>
+          <a:bodyPr wrap="square" lIns="0" rIns="0" tIns="0" bIns="0" anchor="t">
+            <a:spAutoFit/>
+          </a:bodyPr>
+          <a:lstStyle/>
+          <a:p>
+            <a:pPr algn="ctr">
+              <a:lnSpc>
+                <a:spcPts val="942"/>
+              </a:lnSpc>
+            </a:pPr>
+            <a:r>
+              <a:rPr sz="650" b="0">
                 <a:solidFill>
                   <a:srgbClr val="12151C"/>
                 </a:solidFill>
                 <a:latin typeface="맑은 고딕"/>
                 <a:ea typeface="맑은 고딕"/>
               </a:rPr>
-              <a:t>010-1234-5678      name@example.com</a:t>
-            </a:r>
-          </a:p>
-        </p:txBody>
-      </p:sp>
-      <p:sp>
-        <p:nvSpPr>
-          <p:cNvPr id="7" name="텍스트"/>
+              <a:t>010-1234-5678     |     name@example.com</a:t>
+            </a:r>
+          </a:p>
+        </p:txBody>
+      </p:sp>
+      <p:sp>
+        <p:nvSpPr>
+          <p:cNvPr id="17" name="텍스트"/>
           <p:cNvSpPr txBox="1"/>
           <p:nvPr/>
         </p:nvSpPr>
         <p:spPr>
           <a:xfrm>
-            <a:off x="360000" y="1425600"/>
-            <a:ext cx="2520000" cy="133351"/>
+            <a:off x="360000" y="1476000"/>
+            <a:ext cx="2520000" cy="123826"/>
           </a:xfrm>
           <a:prstGeom prst="rect">
             <a:avLst/>
@@ -3299,11 +3539,11 @@
           <a:p>
             <a:pPr algn="ctr">
               <a:lnSpc>
-                <a:spcPts val="1015"/>
+                <a:spcPts val="942"/>
               </a:lnSpc>
             </a:pPr>
             <a:r>
-              <a:rPr sz="700" b="0">
+              <a:rPr sz="650" b="0">
                 <a:solidFill>
                   <a:srgbClr val="6B7280"/>
                 </a:solidFill>
@@ -3311,46 +3551,6 @@
                 <a:ea typeface="맑은 고딕"/>
               </a:rPr>
               <a:t>주소를 입력해 주세요</a:t>
-            </a:r>
-          </a:p>
-        </p:txBody>
-      </p:sp>
-      <p:sp>
-        <p:nvSpPr>
-          <p:cNvPr id="8" name="텍스트"/>
-          <p:cNvSpPr txBox="1"/>
-          <p:nvPr/>
-        </p:nvSpPr>
-        <p:spPr>
-          <a:xfrm>
-            <a:off x="360000" y="1576800"/>
-            <a:ext cx="2520000" cy="104776"/>
-          </a:xfrm>
-          <a:prstGeom prst="rect">
-            <a:avLst/>
-          </a:prstGeom>
-          <a:noFill/>
-        </p:spPr>
-        <p:txBody>
-          <a:bodyPr wrap="square" lIns="0" rIns="0" tIns="0" bIns="0" anchor="t">
-            <a:spAutoFit/>
-          </a:bodyPr>
-          <a:lstStyle/>
-          <a:p>
-            <a:pPr algn="ctr">
-              <a:lnSpc>
-                <a:spcPts val="797"/>
-              </a:lnSpc>
-            </a:pPr>
-            <a:r>
-              <a:rPr sz="550" b="1" spc="300">
-                <a:solidFill>
-                  <a:srgbClr val="6B7280"/>
-                </a:solidFill>
-                <a:latin typeface="맑은 고딕"/>
-                <a:ea typeface="맑은 고딕"/>
-              </a:rPr>
-              <a:t>학교 · 학원 이름</a:t>
             </a:r>
           </a:p>
         </p:txBody>
@@ -3383,43 +3583,14 @@
       <p:grpSpPr/>
       <p:sp>
         <p:nvSpPr>
-          <p:cNvPr id="2" name="Oval 1"/>
-          <p:cNvSpPr/>
-          <p:nvPr/>
-        </p:nvSpPr>
-        <p:spPr>
-          <a:xfrm>
-            <a:off x="1411200" y="295200"/>
-            <a:ext cx="417600" cy="417600"/>
-          </a:xfrm>
-          <a:prstGeom prst="ellipse">
-            <a:avLst/>
-          </a:prstGeom>
-          <a:solidFill>
-            <a:srgbClr val="12151C"/>
-          </a:solidFill>
-          <a:ln>
-            <a:noFill/>
-          </a:ln>
-        </p:spPr>
-        <p:txBody>
-          <a:bodyPr rtlCol="0" anchor="ctr"/>
-          <a:lstStyle/>
-          <a:p>
-            <a:pPr algn="ctr"/>
-          </a:p>
-        </p:txBody>
-      </p:sp>
-      <p:sp>
-        <p:nvSpPr>
-          <p:cNvPr id="3" name="텍스트"/>
+          <p:cNvPr id="2" name="텍스트"/>
           <p:cNvSpPr txBox="1"/>
           <p:nvPr/>
         </p:nvSpPr>
         <p:spPr>
           <a:xfrm>
-            <a:off x="1368000" y="324000"/>
-            <a:ext cx="504000" cy="360000"/>
+            <a:off x="252000" y="252000"/>
+            <a:ext cx="1080000" cy="99061"/>
           </a:xfrm>
           <a:prstGeom prst="rect">
             <a:avLst/>
@@ -3427,79 +3598,39 @@
           <a:noFill/>
         </p:spPr>
         <p:txBody>
-          <a:bodyPr wrap="square" lIns="0" rIns="0" tIns="0" bIns="0" anchor="ctr">
+          <a:bodyPr wrap="square" lIns="0" rIns="0" tIns="0" bIns="0" anchor="t">
             <a:spAutoFit/>
           </a:bodyPr>
           <a:lstStyle/>
           <a:p>
-            <a:pPr algn="ctr">
+            <a:pPr algn="l">
               <a:lnSpc>
-                <a:spcPts val="3769"/>
+                <a:spcPts val="754"/>
               </a:lnSpc>
             </a:pPr>
             <a:r>
-              <a:rPr sz="2600" b="1">
+              <a:rPr sz="520" b="1" spc="240">
                 <a:solidFill>
-                  <a:srgbClr val="FFFFFF"/>
+                  <a:srgbClr val="0E3C37"/>
                 </a:solidFill>
                 <a:latin typeface="맑은 고딕"/>
                 <a:ea typeface="맑은 고딕"/>
               </a:rPr>
-              <a:t>학</a:t>
-            </a:r>
-          </a:p>
-        </p:txBody>
-      </p:sp>
-      <p:sp>
-        <p:nvSpPr>
-          <p:cNvPr id="4" name="텍스트"/>
-          <p:cNvSpPr txBox="1"/>
-          <p:nvPr/>
-        </p:nvSpPr>
-        <p:spPr>
-          <a:xfrm>
-            <a:off x="360000" y="820800"/>
-            <a:ext cx="2520000" cy="161926"/>
-          </a:xfrm>
-          <a:prstGeom prst="rect">
-            <a:avLst/>
-          </a:prstGeom>
-          <a:noFill/>
-        </p:spPr>
-        <p:txBody>
-          <a:bodyPr wrap="square" lIns="0" rIns="0" tIns="0" bIns="0" anchor="t">
-            <a:spAutoFit/>
-          </a:bodyPr>
-          <a:lstStyle/>
-          <a:p>
-            <a:pPr algn="ctr">
-              <a:lnSpc>
-                <a:spcPts val="1232"/>
-              </a:lnSpc>
-            </a:pPr>
-            <a:r>
-              <a:rPr sz="850" b="1" spc="200">
-                <a:solidFill>
-                  <a:srgbClr val="12151C"/>
-                </a:solidFill>
-                <a:latin typeface="맑은 고딕"/>
-                <a:ea typeface="맑은 고딕"/>
-              </a:rPr>
-              <a:t>학교 · 학원 이름</a:t>
-            </a:r>
-          </a:p>
-        </p:txBody>
-      </p:sp>
-      <p:sp>
-        <p:nvSpPr>
-          <p:cNvPr id="5" name="Rectangle 4"/>
+              <a:t>수업 안내</a:t>
+            </a:r>
+          </a:p>
+        </p:txBody>
+      </p:sp>
+      <p:sp>
+        <p:nvSpPr>
+          <p:cNvPr id="3" name="Rectangle 2"/>
           <p:cNvSpPr/>
           <p:nvPr/>
         </p:nvSpPr>
         <p:spPr>
           <a:xfrm>
-            <a:off x="1530000" y="1051200"/>
-            <a:ext cx="180000" cy="14400"/>
+            <a:off x="252000" y="367200"/>
+            <a:ext cx="108000" cy="14400"/>
           </a:xfrm>
           <a:prstGeom prst="rect">
             <a:avLst/>
@@ -3521,14 +3652,45 @@
       </p:sp>
       <p:sp>
         <p:nvSpPr>
-          <p:cNvPr id="6" name="텍스트"/>
+          <p:cNvPr id="4" name="Rounded Rectangle 3"/>
+          <p:cNvSpPr/>
+          <p:nvPr/>
+        </p:nvSpPr>
+        <p:spPr>
+          <a:xfrm>
+            <a:off x="252000" y="540000"/>
+            <a:ext cx="327667" cy="194361"/>
+          </a:xfrm>
+          <a:prstGeom prst="roundRect">
+            <a:avLst>
+              <a:gd name="adj" fmla="val 50000"/>
+            </a:avLst>
+          </a:prstGeom>
+          <a:noFill/>
+          <a:ln w="3600">
+            <a:solidFill>
+              <a:srgbClr val="0E3C37"/>
+            </a:solidFill>
+          </a:ln>
+        </p:spPr>
+        <p:txBody>
+          <a:bodyPr rtlCol="0" anchor="ctr"/>
+          <a:lstStyle/>
+          <a:p>
+            <a:pPr algn="ctr"/>
+          </a:p>
+        </p:txBody>
+      </p:sp>
+      <p:sp>
+        <p:nvSpPr>
+          <p:cNvPr id="5" name="텍스트"/>
           <p:cNvSpPr txBox="1"/>
           <p:nvPr/>
         </p:nvSpPr>
         <p:spPr>
           <a:xfrm>
-            <a:off x="540000" y="1188000"/>
-            <a:ext cx="2160000" cy="360000"/>
+            <a:off x="252000" y="540000"/>
+            <a:ext cx="327667" cy="194361"/>
           </a:xfrm>
           <a:prstGeom prst="rect">
             <a:avLst/>
@@ -3536,25 +3698,459 @@
           <a:noFill/>
         </p:spPr>
         <p:txBody>
+          <a:bodyPr wrap="square" lIns="0" rIns="0" tIns="0" bIns="0" anchor="ctr">
+            <a:spAutoFit/>
+          </a:bodyPr>
+          <a:lstStyle/>
+          <a:p>
+            <a:pPr algn="ctr">
+              <a:lnSpc>
+                <a:spcPts val="986"/>
+              </a:lnSpc>
+            </a:pPr>
+            <a:r>
+              <a:rPr sz="680" b="0">
+                <a:solidFill>
+                  <a:srgbClr val="12151C"/>
+                </a:solidFill>
+                <a:latin typeface="맑은 고딕"/>
+                <a:ea typeface="맑은 고딕"/>
+              </a:rPr>
+              <a:t>수학</a:t>
+            </a:r>
+          </a:p>
+        </p:txBody>
+      </p:sp>
+      <p:sp>
+        <p:nvSpPr>
+          <p:cNvPr id="6" name="Rounded Rectangle 5"/>
+          <p:cNvSpPr/>
+          <p:nvPr/>
+        </p:nvSpPr>
+        <p:spPr>
+          <a:xfrm>
+            <a:off x="630067" y="540000"/>
+            <a:ext cx="327667" cy="194361"/>
+          </a:xfrm>
+          <a:prstGeom prst="roundRect">
+            <a:avLst>
+              <a:gd name="adj" fmla="val 50000"/>
+            </a:avLst>
+          </a:prstGeom>
+          <a:noFill/>
+          <a:ln w="3600">
+            <a:solidFill>
+              <a:srgbClr val="0E3C37"/>
+            </a:solidFill>
+          </a:ln>
+        </p:spPr>
+        <p:txBody>
+          <a:bodyPr rtlCol="0" anchor="ctr"/>
+          <a:lstStyle/>
+          <a:p>
+            <a:pPr algn="ctr"/>
+          </a:p>
+        </p:txBody>
+      </p:sp>
+      <p:sp>
+        <p:nvSpPr>
+          <p:cNvPr id="7" name="텍스트"/>
+          <p:cNvSpPr txBox="1"/>
+          <p:nvPr/>
+        </p:nvSpPr>
+        <p:spPr>
+          <a:xfrm>
+            <a:off x="630067" y="540000"/>
+            <a:ext cx="327667" cy="194361"/>
+          </a:xfrm>
+          <a:prstGeom prst="rect">
+            <a:avLst/>
+          </a:prstGeom>
+          <a:noFill/>
+        </p:spPr>
+        <p:txBody>
+          <a:bodyPr wrap="square" lIns="0" rIns="0" tIns="0" bIns="0" anchor="ctr">
+            <a:spAutoFit/>
+          </a:bodyPr>
+          <a:lstStyle/>
+          <a:p>
+            <a:pPr algn="ctr">
+              <a:lnSpc>
+                <a:spcPts val="986"/>
+              </a:lnSpc>
+            </a:pPr>
+            <a:r>
+              <a:rPr sz="680" b="0">
+                <a:solidFill>
+                  <a:srgbClr val="12151C"/>
+                </a:solidFill>
+                <a:latin typeface="맑은 고딕"/>
+                <a:ea typeface="맑은 고딕"/>
+              </a:rPr>
+              <a:t>영어</a:t>
+            </a:r>
+          </a:p>
+        </p:txBody>
+      </p:sp>
+      <p:sp>
+        <p:nvSpPr>
+          <p:cNvPr id="8" name="Rounded Rectangle 7"/>
+          <p:cNvSpPr/>
+          <p:nvPr/>
+        </p:nvSpPr>
+        <p:spPr>
+          <a:xfrm>
+            <a:off x="1008133" y="540000"/>
+            <a:ext cx="581567" cy="194361"/>
+          </a:xfrm>
+          <a:prstGeom prst="roundRect">
+            <a:avLst>
+              <a:gd name="adj" fmla="val 50000"/>
+            </a:avLst>
+          </a:prstGeom>
+          <a:noFill/>
+          <a:ln w="3600">
+            <a:solidFill>
+              <a:srgbClr val="0E3C37"/>
+            </a:solidFill>
+          </a:ln>
+        </p:spPr>
+        <p:txBody>
+          <a:bodyPr rtlCol="0" anchor="ctr"/>
+          <a:lstStyle/>
+          <a:p>
+            <a:pPr algn="ctr"/>
+          </a:p>
+        </p:txBody>
+      </p:sp>
+      <p:sp>
+        <p:nvSpPr>
+          <p:cNvPr id="9" name="텍스트"/>
+          <p:cNvSpPr txBox="1"/>
+          <p:nvPr/>
+        </p:nvSpPr>
+        <p:spPr>
+          <a:xfrm>
+            <a:off x="1008133" y="540000"/>
+            <a:ext cx="581567" cy="194361"/>
+          </a:xfrm>
+          <a:prstGeom prst="rect">
+            <a:avLst/>
+          </a:prstGeom>
+          <a:noFill/>
+        </p:spPr>
+        <p:txBody>
+          <a:bodyPr wrap="square" lIns="0" rIns="0" tIns="0" bIns="0" anchor="ctr">
+            <a:spAutoFit/>
+          </a:bodyPr>
+          <a:lstStyle/>
+          <a:p>
+            <a:pPr algn="ctr">
+              <a:lnSpc>
+                <a:spcPts val="986"/>
+              </a:lnSpc>
+            </a:pPr>
+            <a:r>
+              <a:rPr sz="680" b="0">
+                <a:solidFill>
+                  <a:srgbClr val="12151C"/>
+                </a:solidFill>
+                <a:latin typeface="맑은 고딕"/>
+                <a:ea typeface="맑은 고딕"/>
+              </a:rPr>
+              <a:t>진로 상담</a:t>
+            </a:r>
+          </a:p>
+        </p:txBody>
+      </p:sp>
+      <p:sp>
+        <p:nvSpPr>
+          <p:cNvPr id="10" name="Rounded Rectangle 9"/>
+          <p:cNvSpPr/>
+          <p:nvPr/>
+        </p:nvSpPr>
+        <p:spPr>
+          <a:xfrm>
+            <a:off x="1640100" y="540000"/>
+            <a:ext cx="666200" cy="194361"/>
+          </a:xfrm>
+          <a:prstGeom prst="roundRect">
+            <a:avLst>
+              <a:gd name="adj" fmla="val 50000"/>
+            </a:avLst>
+          </a:prstGeom>
+          <a:noFill/>
+          <a:ln w="3600">
+            <a:solidFill>
+              <a:srgbClr val="0E3C37"/>
+            </a:solidFill>
+          </a:ln>
+        </p:spPr>
+        <p:txBody>
+          <a:bodyPr rtlCol="0" anchor="ctr"/>
+          <a:lstStyle/>
+          <a:p>
+            <a:pPr algn="ctr"/>
+          </a:p>
+        </p:txBody>
+      </p:sp>
+      <p:sp>
+        <p:nvSpPr>
+          <p:cNvPr id="11" name="텍스트"/>
+          <p:cNvSpPr txBox="1"/>
+          <p:nvPr/>
+        </p:nvSpPr>
+        <p:spPr>
+          <a:xfrm>
+            <a:off x="1640100" y="540000"/>
+            <a:ext cx="666200" cy="194361"/>
+          </a:xfrm>
+          <a:prstGeom prst="rect">
+            <a:avLst/>
+          </a:prstGeom>
+          <a:noFill/>
+        </p:spPr>
+        <p:txBody>
+          <a:bodyPr wrap="square" lIns="0" rIns="0" tIns="0" bIns="0" anchor="ctr">
+            <a:spAutoFit/>
+          </a:bodyPr>
+          <a:lstStyle/>
+          <a:p>
+            <a:pPr algn="ctr">
+              <a:lnSpc>
+                <a:spcPts val="986"/>
+              </a:lnSpc>
+            </a:pPr>
+            <a:r>
+              <a:rPr sz="680" b="0">
+                <a:solidFill>
+                  <a:srgbClr val="12151C"/>
+                </a:solidFill>
+                <a:latin typeface="맑은 고딕"/>
+                <a:ea typeface="맑은 고딕"/>
+              </a:rPr>
+              <a:t>방과후 수업</a:t>
+            </a:r>
+          </a:p>
+        </p:txBody>
+      </p:sp>
+      <p:cxnSp>
+        <p:nvCxnSpPr>
+          <p:cNvPr id="12" name="Connector 11"/>
+          <p:cNvCxnSpPr/>
+          <p:nvPr/>
+        </p:nvCxnSpPr>
+        <p:spPr>
+          <a:xfrm>
+            <a:off x="252000" y="1339200"/>
+            <a:ext cx="2736000" cy="0"/>
+          </a:xfrm>
+          <a:prstGeom prst="line">
+            <a:avLst/>
+          </a:prstGeom>
+          <a:ln w="3600">
+            <a:solidFill>
+              <a:srgbClr val="078065"/>
+            </a:solidFill>
+          </a:ln>
+        </p:spPr>
+      </p:cxnSp>
+      <p:sp>
+        <p:nvSpPr>
+          <p:cNvPr id="13" name="텍스트"/>
+          <p:cNvSpPr txBox="1"/>
+          <p:nvPr/>
+        </p:nvSpPr>
+        <p:spPr>
+          <a:xfrm>
+            <a:off x="252000" y="1422000"/>
+            <a:ext cx="396000" cy="91441"/>
+          </a:xfrm>
+          <a:prstGeom prst="rect">
+            <a:avLst/>
+          </a:prstGeom>
+          <a:noFill/>
+        </p:spPr>
+        <p:txBody>
           <a:bodyPr wrap="square" lIns="0" rIns="0" tIns="0" bIns="0" anchor="t">
             <a:spAutoFit/>
           </a:bodyPr>
           <a:lstStyle/>
           <a:p>
-            <a:pPr algn="ctr">
+            <a:pPr algn="l">
               <a:lnSpc>
-                <a:spcPts val="1305"/>
+                <a:spcPts val="696"/>
               </a:lnSpc>
             </a:pPr>
             <a:r>
-              <a:rPr sz="900" b="1">
+              <a:rPr sz="480" b="1" spc="140">
                 <a:solidFill>
                   <a:srgbClr val="0E3C37"/>
                 </a:solidFill>
                 <a:latin typeface="맑은 고딕"/>
                 <a:ea typeface="맑은 고딕"/>
               </a:rPr>
-              <a:t>따뜻한 눈빛으로 맞이합니다</a:t>
+              <a:t>HOURS</a:t>
+            </a:r>
+          </a:p>
+        </p:txBody>
+      </p:sp>
+      <p:sp>
+        <p:nvSpPr>
+          <p:cNvPr id="14" name="텍스트"/>
+          <p:cNvSpPr txBox="1"/>
+          <p:nvPr/>
+        </p:nvSpPr>
+        <p:spPr>
+          <a:xfrm>
+            <a:off x="648000" y="1411200"/>
+            <a:ext cx="2340000" cy="121921"/>
+          </a:xfrm>
+          <a:prstGeom prst="rect">
+            <a:avLst/>
+          </a:prstGeom>
+          <a:noFill/>
+        </p:spPr>
+        <p:txBody>
+          <a:bodyPr wrap="square" lIns="0" rIns="0" tIns="0" bIns="0" anchor="t">
+            <a:spAutoFit/>
+          </a:bodyPr>
+          <a:lstStyle/>
+          <a:p>
+            <a:pPr algn="l">
+              <a:lnSpc>
+                <a:spcPts val="927"/>
+              </a:lnSpc>
+            </a:pPr>
+            <a:r>
+              <a:rPr sz="640" b="0">
+                <a:solidFill>
+                  <a:srgbClr val="12151C"/>
+                </a:solidFill>
+                <a:latin typeface="맑은 고딕"/>
+                <a:ea typeface="맑은 고딕"/>
+              </a:rPr>
+              <a:t>상담 시간 사전 예약</a:t>
+            </a:r>
+          </a:p>
+        </p:txBody>
+      </p:sp>
+      <p:sp>
+        <p:nvSpPr>
+          <p:cNvPr id="15" name="텍스트"/>
+          <p:cNvSpPr txBox="1"/>
+          <p:nvPr/>
+        </p:nvSpPr>
+        <p:spPr>
+          <a:xfrm>
+            <a:off x="252000" y="1580400"/>
+            <a:ext cx="396000" cy="91441"/>
+          </a:xfrm>
+          <a:prstGeom prst="rect">
+            <a:avLst/>
+          </a:prstGeom>
+          <a:noFill/>
+        </p:spPr>
+        <p:txBody>
+          <a:bodyPr wrap="square" lIns="0" rIns="0" tIns="0" bIns="0" anchor="t">
+            <a:spAutoFit/>
+          </a:bodyPr>
+          <a:lstStyle/>
+          <a:p>
+            <a:pPr algn="l">
+              <a:lnSpc>
+                <a:spcPts val="696"/>
+              </a:lnSpc>
+            </a:pPr>
+            <a:r>
+              <a:rPr sz="480" b="1" spc="140">
+                <a:solidFill>
+                  <a:srgbClr val="0E3C37"/>
+                </a:solidFill>
+                <a:latin typeface="맑은 고딕"/>
+                <a:ea typeface="맑은 고딕"/>
+              </a:rPr>
+              <a:t>KAKAO</a:t>
+            </a:r>
+          </a:p>
+        </p:txBody>
+      </p:sp>
+      <p:sp>
+        <p:nvSpPr>
+          <p:cNvPr id="16" name="텍스트"/>
+          <p:cNvSpPr txBox="1"/>
+          <p:nvPr/>
+        </p:nvSpPr>
+        <p:spPr>
+          <a:xfrm>
+            <a:off x="648000" y="1569600"/>
+            <a:ext cx="2340000" cy="121921"/>
+          </a:xfrm>
+          <a:prstGeom prst="rect">
+            <a:avLst/>
+          </a:prstGeom>
+          <a:noFill/>
+        </p:spPr>
+        <p:txBody>
+          <a:bodyPr wrap="square" lIns="0" rIns="0" tIns="0" bIns="0" anchor="t">
+            <a:spAutoFit/>
+          </a:bodyPr>
+          <a:lstStyle/>
+          <a:p>
+            <a:pPr algn="l">
+              <a:lnSpc>
+                <a:spcPts val="927"/>
+              </a:lnSpc>
+            </a:pPr>
+            <a:r>
+              <a:rPr sz="640" b="0">
+                <a:solidFill>
+                  <a:srgbClr val="12151C"/>
+                </a:solidFill>
+                <a:latin typeface="맑은 고딕"/>
+                <a:ea typeface="맑은 고딕"/>
+              </a:rPr>
+              <a:t>@채널아이디</a:t>
+            </a:r>
+          </a:p>
+        </p:txBody>
+      </p:sp>
+      <p:sp>
+        <p:nvSpPr>
+          <p:cNvPr id="17" name="텍스트"/>
+          <p:cNvSpPr txBox="1"/>
+          <p:nvPr/>
+        </p:nvSpPr>
+        <p:spPr>
+          <a:xfrm>
+            <a:off x="1548000" y="1411200"/>
+            <a:ext cx="1440000" cy="123826"/>
+          </a:xfrm>
+          <a:prstGeom prst="rect">
+            <a:avLst/>
+          </a:prstGeom>
+          <a:noFill/>
+        </p:spPr>
+        <p:txBody>
+          <a:bodyPr wrap="square" lIns="0" rIns="0" tIns="0" bIns="0" anchor="t">
+            <a:spAutoFit/>
+          </a:bodyPr>
+          <a:lstStyle/>
+          <a:p>
+            <a:pPr algn="r">
+              <a:lnSpc>
+                <a:spcPts val="942"/>
+              </a:lnSpc>
+            </a:pPr>
+            <a:r>
+              <a:rPr sz="650" b="1" spc="220">
+                <a:solidFill>
+                  <a:srgbClr val="0E3C37"/>
+                </a:solidFill>
+                <a:latin typeface="맑은 고딕"/>
+                <a:ea typeface="맑은 고딕"/>
+              </a:rPr>
+              <a:t>학교 · 학원 이름</a:t>
             </a:r>
           </a:p>
         </p:txBody>
